--- a/exam-generator/sp025-exam-generator/c8/files.pptx
+++ b/exam-generator/sp025-exam-generator/c8/files.pptx
@@ -5,12 +5,18 @@
     <p:sldMasterId id="2147483648" r:id="rId1"/>
   </p:sldMasterIdLst>
   <p:notesMasterIdLst>
-    <p:notesMasterId r:id="rId5"/>
+    <p:notesMasterId r:id="rId11"/>
   </p:notesMasterIdLst>
   <p:sldIdLst>
     <p:sldId id="258" r:id="rId2"/>
-    <p:sldId id="259" r:id="rId3"/>
-    <p:sldId id="260" r:id="rId4"/>
+    <p:sldId id="263" r:id="rId3"/>
+    <p:sldId id="264" r:id="rId4"/>
+    <p:sldId id="270" r:id="rId5"/>
+    <p:sldId id="271" r:id="rId6"/>
+    <p:sldId id="272" r:id="rId7"/>
+    <p:sldId id="273" r:id="rId8"/>
+    <p:sldId id="259" r:id="rId9"/>
+    <p:sldId id="260" r:id="rId10"/>
   </p:sldIdLst>
   <p:sldSz cx="12192000" cy="6858000"/>
   <p:notesSz cx="6858000" cy="9144000"/>
@@ -109,6 +115,11 @@
       </a:defRPr>
     </a:lvl9pPr>
   </p:defaultTextStyle>
+  <p:extLst>
+    <p:ext uri="{EFAFB233-063F-42B5-8137-9DF3F51BA10A}">
+      <p15:sldGuideLst xmlns:p15="http://schemas.microsoft.com/office/powerpoint/2012/main"/>
+    </p:ext>
+  </p:extLst>
 </p:presentation>
 </file>
 
@@ -194,7 +205,7 @@
           <a:p>
             <a:fld id="{E930CEF5-4124-458A-8583-FB2A0D68282E}" type="datetimeFigureOut">
               <a:rPr lang="en-MY" smtClean="0"/>
-              <a:t>16/3/2026</a:t>
+              <a:t>16/4/2026</a:t>
             </a:fld>
             <a:endParaRPr lang="en-MY"/>
           </a:p>
@@ -614,8 +625,8 @@
         </p:nvSpPr>
         <p:spPr/>
       </p:sp>
-      <mc:AlternateContent xmlns:mc="http://schemas.openxmlformats.org/markup-compatibility/2006">
-        <mc:Choice xmlns:a14="http://schemas.microsoft.com/office/drawing/2010/main" Requires="a14">
+      <mc:AlternateContent xmlns:mc="http://schemas.openxmlformats.org/markup-compatibility/2006" xmlns:a14="http://schemas.microsoft.com/office/drawing/2010/main">
+        <mc:Choice Requires="a14">
           <p:sp>
             <p:nvSpPr>
               <p:cNvPr id="3" name="Notes Placeholder 2">
@@ -637,6 +648,7 @@
               <a:bodyPr/>
               <a:lstStyle/>
               <a:p>
+                <a:pPr/>
                 <a14:m>
                   <m:oMathPara xmlns:m="http://schemas.openxmlformats.org/officeDocument/2006/math">
                     <m:oMathParaPr>
@@ -669,7 +681,7 @@
             </p:txBody>
           </p:sp>
         </mc:Choice>
-        <mc:Fallback>
+        <mc:Fallback xmlns="">
           <p:sp>
             <p:nvSpPr>
               <p:cNvPr id="3" name="Notes Placeholder 2">
@@ -726,7 +738,7 @@
           <a:p>
             <a:fld id="{1D43B765-2686-4739-8603-5834023752E4}" type="slidenum">
               <a:rPr lang="en-MY" smtClean="0"/>
-              <a:t>2</a:t>
+              <a:t>8</a:t>
             </a:fld>
             <a:endParaRPr lang="en-MY"/>
           </a:p>
@@ -786,8 +798,8 @@
         </p:nvSpPr>
         <p:spPr/>
       </p:sp>
-      <mc:AlternateContent xmlns:mc="http://schemas.openxmlformats.org/markup-compatibility/2006">
-        <mc:Choice xmlns:a14="http://schemas.microsoft.com/office/drawing/2010/main" Requires="a14">
+      <mc:AlternateContent xmlns:mc="http://schemas.openxmlformats.org/markup-compatibility/2006" xmlns:a14="http://schemas.microsoft.com/office/drawing/2010/main">
+        <mc:Choice Requires="a14">
           <p:sp>
             <p:nvSpPr>
               <p:cNvPr id="3" name="Notes Placeholder 2">
@@ -809,6 +821,7 @@
               <a:bodyPr/>
               <a:lstStyle/>
               <a:p>
+                <a:pPr/>
                 <a14:m>
                   <m:oMathPara xmlns:m="http://schemas.openxmlformats.org/officeDocument/2006/math">
                     <m:oMathParaPr>
@@ -841,7 +854,7 @@
             </p:txBody>
           </p:sp>
         </mc:Choice>
-        <mc:Fallback>
+        <mc:Fallback xmlns="">
           <p:sp>
             <p:nvSpPr>
               <p:cNvPr id="3" name="Notes Placeholder 2">
@@ -898,7 +911,7 @@
           <a:p>
             <a:fld id="{1D43B765-2686-4739-8603-5834023752E4}" type="slidenum">
               <a:rPr lang="en-MY" smtClean="0"/>
-              <a:t>3</a:t>
+              <a:t>9</a:t>
             </a:fld>
             <a:endParaRPr lang="en-MY"/>
           </a:p>
@@ -1066,7 +1079,7 @@
           <a:p>
             <a:fld id="{55736931-D21D-4CEE-8596-8652B0B9C773}" type="datetimeFigureOut">
               <a:rPr lang="en-MY" smtClean="0"/>
-              <a:t>16/3/2026</a:t>
+              <a:t>16/4/2026</a:t>
             </a:fld>
             <a:endParaRPr lang="en-MY"/>
           </a:p>
@@ -1266,7 +1279,7 @@
           <a:p>
             <a:fld id="{55736931-D21D-4CEE-8596-8652B0B9C773}" type="datetimeFigureOut">
               <a:rPr lang="en-MY" smtClean="0"/>
-              <a:t>16/3/2026</a:t>
+              <a:t>16/4/2026</a:t>
             </a:fld>
             <a:endParaRPr lang="en-MY"/>
           </a:p>
@@ -1476,7 +1489,7 @@
           <a:p>
             <a:fld id="{55736931-D21D-4CEE-8596-8652B0B9C773}" type="datetimeFigureOut">
               <a:rPr lang="en-MY" smtClean="0"/>
-              <a:t>16/3/2026</a:t>
+              <a:t>16/4/2026</a:t>
             </a:fld>
             <a:endParaRPr lang="en-MY"/>
           </a:p>
@@ -1676,7 +1689,7 @@
           <a:p>
             <a:fld id="{55736931-D21D-4CEE-8596-8652B0B9C773}" type="datetimeFigureOut">
               <a:rPr lang="en-MY" smtClean="0"/>
-              <a:t>16/3/2026</a:t>
+              <a:t>16/4/2026</a:t>
             </a:fld>
             <a:endParaRPr lang="en-MY"/>
           </a:p>
@@ -1952,7 +1965,7 @@
           <a:p>
             <a:fld id="{55736931-D21D-4CEE-8596-8652B0B9C773}" type="datetimeFigureOut">
               <a:rPr lang="en-MY" smtClean="0"/>
-              <a:t>16/3/2026</a:t>
+              <a:t>16/4/2026</a:t>
             </a:fld>
             <a:endParaRPr lang="en-MY"/>
           </a:p>
@@ -2220,7 +2233,7 @@
           <a:p>
             <a:fld id="{55736931-D21D-4CEE-8596-8652B0B9C773}" type="datetimeFigureOut">
               <a:rPr lang="en-MY" smtClean="0"/>
-              <a:t>16/3/2026</a:t>
+              <a:t>16/4/2026</a:t>
             </a:fld>
             <a:endParaRPr lang="en-MY"/>
           </a:p>
@@ -2635,7 +2648,7 @@
           <a:p>
             <a:fld id="{55736931-D21D-4CEE-8596-8652B0B9C773}" type="datetimeFigureOut">
               <a:rPr lang="en-MY" smtClean="0"/>
-              <a:t>16/3/2026</a:t>
+              <a:t>16/4/2026</a:t>
             </a:fld>
             <a:endParaRPr lang="en-MY"/>
           </a:p>
@@ -2777,7 +2790,7 @@
           <a:p>
             <a:fld id="{55736931-D21D-4CEE-8596-8652B0B9C773}" type="datetimeFigureOut">
               <a:rPr lang="en-MY" smtClean="0"/>
-              <a:t>16/3/2026</a:t>
+              <a:t>16/4/2026</a:t>
             </a:fld>
             <a:endParaRPr lang="en-MY"/>
           </a:p>
@@ -2890,7 +2903,7 @@
           <a:p>
             <a:fld id="{55736931-D21D-4CEE-8596-8652B0B9C773}" type="datetimeFigureOut">
               <a:rPr lang="en-MY" smtClean="0"/>
-              <a:t>16/3/2026</a:t>
+              <a:t>16/4/2026</a:t>
             </a:fld>
             <a:endParaRPr lang="en-MY"/>
           </a:p>
@@ -3203,7 +3216,7 @@
           <a:p>
             <a:fld id="{55736931-D21D-4CEE-8596-8652B0B9C773}" type="datetimeFigureOut">
               <a:rPr lang="en-MY" smtClean="0"/>
-              <a:t>16/3/2026</a:t>
+              <a:t>16/4/2026</a:t>
             </a:fld>
             <a:endParaRPr lang="en-MY"/>
           </a:p>
@@ -3492,7 +3505,7 @@
           <a:p>
             <a:fld id="{55736931-D21D-4CEE-8596-8652B0B9C773}" type="datetimeFigureOut">
               <a:rPr lang="en-MY" smtClean="0"/>
-              <a:t>16/3/2026</a:t>
+              <a:t>16/4/2026</a:t>
             </a:fld>
             <a:endParaRPr lang="en-MY"/>
           </a:p>
@@ -3735,7 +3748,7 @@
           <a:p>
             <a:fld id="{55736931-D21D-4CEE-8596-8652B0B9C773}" type="datetimeFigureOut">
               <a:rPr lang="en-MY" smtClean="0"/>
-              <a:t>16/3/2026</a:t>
+              <a:t>16/4/2026</a:t>
             </a:fld>
             <a:endParaRPr lang="en-MY"/>
           </a:p>
@@ -4245,6 +4258,1808 @@
         <p:cNvPr id="1" name="">
           <a:extLst>
             <a:ext uri="{FF2B5EF4-FFF2-40B4-BE49-F238E27FC236}">
+              <a16:creationId xmlns:a16="http://schemas.microsoft.com/office/drawing/2014/main" id="{1E88DC8D-026E-EEA2-A10D-19BEBE6BADC2}"/>
+            </a:ext>
+          </a:extLst>
+        </p:cNvPr>
+        <p:cNvGrpSpPr/>
+        <p:nvPr/>
+      </p:nvGrpSpPr>
+      <p:grpSpPr>
+        <a:xfrm>
+          <a:off x="0" y="0"/>
+          <a:ext cx="0" cy="0"/>
+          <a:chOff x="0" y="0"/>
+          <a:chExt cx="0" cy="0"/>
+        </a:xfrm>
+      </p:grpSpPr>
+      <p:sp>
+        <p:nvSpPr>
+          <p:cNvPr id="3" name="TextBox 2">
+            <a:extLst>
+              <a:ext uri="{FF2B5EF4-FFF2-40B4-BE49-F238E27FC236}">
+                <a16:creationId xmlns:a16="http://schemas.microsoft.com/office/drawing/2014/main" id="{2B5AEDAA-9F8B-E385-685A-F89A94FA2364}"/>
+              </a:ext>
+            </a:extLst>
+          </p:cNvPr>
+          <p:cNvSpPr txBox="1"/>
+          <p:nvPr/>
+        </p:nvSpPr>
+        <p:spPr>
+          <a:xfrm>
+            <a:off x="914400" y="746649"/>
+            <a:ext cx="10580914" cy="646331"/>
+          </a:xfrm>
+          <a:prstGeom prst="rect">
+            <a:avLst/>
+          </a:prstGeom>
+          <a:noFill/>
+        </p:spPr>
+        <p:txBody>
+          <a:bodyPr wrap="square">
+            <a:spAutoFit/>
+          </a:bodyPr>
+          <a:lstStyle/>
+          <a:p>
+            <a:pPr>
+              <a:buNone/>
+            </a:pPr>
+            <a:r>
+              <a:rPr lang="en-US" dirty="0">
+                <a:latin typeface="Times New Roman" panose="02020603050405020304" pitchFamily="18" charset="0"/>
+                <a:cs typeface="Times New Roman" panose="02020603050405020304" pitchFamily="18" charset="0"/>
+              </a:rPr>
+              <a:t>8. An electron has energy of 200 eV. Calculate the de Broglie wavelength associated with the electron.</a:t>
+            </a:r>
+          </a:p>
+          <a:p>
+            <a:pPr algn="r">
+              <a:buNone/>
+            </a:pPr>
+            <a:r>
+              <a:rPr lang="en-US" dirty="0">
+                <a:latin typeface="Times New Roman" panose="02020603050405020304" pitchFamily="18" charset="0"/>
+                <a:cs typeface="Times New Roman" panose="02020603050405020304" pitchFamily="18" charset="0"/>
+              </a:rPr>
+              <a:t>[3 marks]</a:t>
+            </a:r>
+          </a:p>
+        </p:txBody>
+      </p:sp>
+      <p:pic>
+        <p:nvPicPr>
+          <p:cNvPr id="5" name="Picture 4">
+            <a:extLst>
+              <a:ext uri="{FF2B5EF4-FFF2-40B4-BE49-F238E27FC236}">
+                <a16:creationId xmlns:a16="http://schemas.microsoft.com/office/drawing/2014/main" id="{05E1E259-EEE9-58C3-FA5E-E92C9CA3F92A}"/>
+              </a:ext>
+            </a:extLst>
+          </p:cNvPr>
+          <p:cNvPicPr>
+            <a:picLocks noChangeAspect="1"/>
+          </p:cNvPicPr>
+          <p:nvPr/>
+        </p:nvPicPr>
+        <p:blipFill>
+          <a:blip r:embed="rId2"/>
+          <a:stretch>
+            <a:fillRect/>
+          </a:stretch>
+        </p:blipFill>
+        <p:spPr>
+          <a:xfrm>
+            <a:off x="7131161" y="6111351"/>
+            <a:ext cx="4896533" cy="362001"/>
+          </a:xfrm>
+          <a:prstGeom prst="rect">
+            <a:avLst/>
+          </a:prstGeom>
+        </p:spPr>
+      </p:pic>
+    </p:spTree>
+    <p:extLst>
+      <p:ext uri="{BB962C8B-B14F-4D97-AF65-F5344CB8AC3E}">
+        <p14:creationId xmlns:p14="http://schemas.microsoft.com/office/powerpoint/2010/main" val="1810659657"/>
+      </p:ext>
+    </p:extLst>
+  </p:cSld>
+  <p:clrMapOvr>
+    <a:masterClrMapping/>
+  </p:clrMapOvr>
+</p:sld>
+</file>
+
+<file path=ppt/slides/slide3.xml><?xml version="1.0" encoding="utf-8"?>
+<p:sld xmlns:a="http://schemas.openxmlformats.org/drawingml/2006/main" xmlns:r="http://schemas.openxmlformats.org/officeDocument/2006/relationships" xmlns:p="http://schemas.openxmlformats.org/presentationml/2006/main">
+  <p:cSld>
+    <p:spTree>
+      <p:nvGrpSpPr>
+        <p:cNvPr id="1" name="">
+          <a:extLst>
+            <a:ext uri="{FF2B5EF4-FFF2-40B4-BE49-F238E27FC236}">
+              <a16:creationId xmlns:a16="http://schemas.microsoft.com/office/drawing/2014/main" id="{286A8EFD-BAC9-9ED2-CFCC-5E8AE61151FE}"/>
+            </a:ext>
+          </a:extLst>
+        </p:cNvPr>
+        <p:cNvGrpSpPr/>
+        <p:nvPr/>
+      </p:nvGrpSpPr>
+      <p:grpSpPr>
+        <a:xfrm>
+          <a:off x="0" y="0"/>
+          <a:ext cx="0" cy="0"/>
+          <a:chOff x="0" y="0"/>
+          <a:chExt cx="0" cy="0"/>
+        </a:xfrm>
+      </p:grpSpPr>
+      <p:sp>
+        <p:nvSpPr>
+          <p:cNvPr id="3" name="TextBox 2">
+            <a:extLst>
+              <a:ext uri="{FF2B5EF4-FFF2-40B4-BE49-F238E27FC236}">
+                <a16:creationId xmlns:a16="http://schemas.microsoft.com/office/drawing/2014/main" id="{78DFB4D1-2D3F-2AD3-9461-7E58E9E1013E}"/>
+              </a:ext>
+            </a:extLst>
+          </p:cNvPr>
+          <p:cNvSpPr txBox="1"/>
+          <p:nvPr/>
+        </p:nvSpPr>
+        <p:spPr>
+          <a:xfrm>
+            <a:off x="889686" y="487230"/>
+            <a:ext cx="10577384" cy="923330"/>
+          </a:xfrm>
+          <a:prstGeom prst="rect">
+            <a:avLst/>
+          </a:prstGeom>
+          <a:noFill/>
+        </p:spPr>
+        <p:txBody>
+          <a:bodyPr wrap="square">
+            <a:spAutoFit/>
+          </a:bodyPr>
+          <a:lstStyle/>
+          <a:p>
+            <a:pPr marL="342900" indent="-342900">
+              <a:buAutoNum type="arabicPeriod" startAt="8"/>
+            </a:pPr>
+            <a:r>
+              <a:rPr lang="en-US" dirty="0">
+                <a:latin typeface="Times New Roman" panose="02020603050405020304" pitchFamily="18" charset="0"/>
+                <a:cs typeface="Times New Roman" panose="02020603050405020304" pitchFamily="18" charset="0"/>
+              </a:rPr>
+              <a:t>An electron and a proton are accelerated through the same voltage. If the de Broglie wavelength of the electron is 0.12 nm, what is the de Broglie wavelength of the proton?</a:t>
+            </a:r>
+          </a:p>
+          <a:p>
+            <a:pPr algn="r"/>
+            <a:r>
+              <a:rPr lang="en-US" dirty="0">
+                <a:latin typeface="Times New Roman" panose="02020603050405020304" pitchFamily="18" charset="0"/>
+                <a:cs typeface="Times New Roman" panose="02020603050405020304" pitchFamily="18" charset="0"/>
+              </a:rPr>
+              <a:t> [3 marks]</a:t>
+            </a:r>
+          </a:p>
+        </p:txBody>
+      </p:sp>
+      <p:pic>
+        <p:nvPicPr>
+          <p:cNvPr id="5" name="Picture 4">
+            <a:extLst>
+              <a:ext uri="{FF2B5EF4-FFF2-40B4-BE49-F238E27FC236}">
+                <a16:creationId xmlns:a16="http://schemas.microsoft.com/office/drawing/2014/main" id="{0D4B8214-B844-1AF7-B9A4-30CB14CDCDBD}"/>
+              </a:ext>
+            </a:extLst>
+          </p:cNvPr>
+          <p:cNvPicPr>
+            <a:picLocks noChangeAspect="1"/>
+          </p:cNvPicPr>
+          <p:nvPr/>
+        </p:nvPicPr>
+        <p:blipFill>
+          <a:blip r:embed="rId2"/>
+          <a:stretch>
+            <a:fillRect/>
+          </a:stretch>
+        </p:blipFill>
+        <p:spPr>
+          <a:xfrm>
+            <a:off x="6652857" y="6408870"/>
+            <a:ext cx="5096586" cy="152421"/>
+          </a:xfrm>
+          <a:prstGeom prst="rect">
+            <a:avLst/>
+          </a:prstGeom>
+        </p:spPr>
+      </p:pic>
+    </p:spTree>
+    <p:extLst>
+      <p:ext uri="{BB962C8B-B14F-4D97-AF65-F5344CB8AC3E}">
+        <p14:creationId xmlns:p14="http://schemas.microsoft.com/office/powerpoint/2010/main" val="2014924233"/>
+      </p:ext>
+    </p:extLst>
+  </p:cSld>
+  <p:clrMapOvr>
+    <a:masterClrMapping/>
+  </p:clrMapOvr>
+</p:sld>
+</file>
+
+<file path=ppt/slides/slide4.xml><?xml version="1.0" encoding="utf-8"?>
+<p:sld xmlns:a="http://schemas.openxmlformats.org/drawingml/2006/main" xmlns:r="http://schemas.openxmlformats.org/officeDocument/2006/relationships" xmlns:p="http://schemas.openxmlformats.org/presentationml/2006/main">
+  <p:cSld>
+    <p:spTree>
+      <p:nvGrpSpPr>
+        <p:cNvPr id="1" name="">
+          <a:extLst>
+            <a:ext uri="{FF2B5EF4-FFF2-40B4-BE49-F238E27FC236}">
+              <a16:creationId xmlns:a16="http://schemas.microsoft.com/office/drawing/2014/main" id="{393FE0DF-C758-3F33-1749-1D0F66FB51CF}"/>
+            </a:ext>
+          </a:extLst>
+        </p:cNvPr>
+        <p:cNvGrpSpPr/>
+        <p:nvPr/>
+      </p:nvGrpSpPr>
+      <p:grpSpPr>
+        <a:xfrm>
+          <a:off x="0" y="0"/>
+          <a:ext cx="0" cy="0"/>
+          <a:chOff x="0" y="0"/>
+          <a:chExt cx="0" cy="0"/>
+        </a:xfrm>
+      </p:grpSpPr>
+      <p:sp>
+        <p:nvSpPr>
+          <p:cNvPr id="3" name="TextBox 2">
+            <a:extLst>
+              <a:ext uri="{FF2B5EF4-FFF2-40B4-BE49-F238E27FC236}">
+                <a16:creationId xmlns:a16="http://schemas.microsoft.com/office/drawing/2014/main" id="{14E17C81-16DF-4B74-EF4F-2BB1C7D1B67F}"/>
+              </a:ext>
+            </a:extLst>
+          </p:cNvPr>
+          <p:cNvSpPr txBox="1"/>
+          <p:nvPr/>
+        </p:nvSpPr>
+        <p:spPr>
+          <a:xfrm>
+            <a:off x="836193" y="771709"/>
+            <a:ext cx="10497553" cy="646331"/>
+          </a:xfrm>
+          <a:prstGeom prst="rect">
+            <a:avLst/>
+          </a:prstGeom>
+          <a:noFill/>
+        </p:spPr>
+        <p:txBody>
+          <a:bodyPr wrap="square">
+            <a:spAutoFit/>
+          </a:bodyPr>
+          <a:lstStyle/>
+          <a:p>
+            <a:r>
+              <a:rPr lang="en-US" dirty="0">
+                <a:latin typeface="Times New Roman" panose="02020603050405020304" pitchFamily="18" charset="0"/>
+                <a:cs typeface="Times New Roman" panose="02020603050405020304" pitchFamily="18" charset="0"/>
+              </a:rPr>
+              <a:t>8. The de Broglie wavelength of an electron is 1.00 nm. What is the kinetic energy of the electron? </a:t>
+            </a:r>
+          </a:p>
+          <a:p>
+            <a:pPr algn="r"/>
+            <a:r>
+              <a:rPr lang="en-US" dirty="0">
+                <a:latin typeface="Times New Roman" panose="02020603050405020304" pitchFamily="18" charset="0"/>
+                <a:cs typeface="Times New Roman" panose="02020603050405020304" pitchFamily="18" charset="0"/>
+              </a:rPr>
+              <a:t>[3 marks</a:t>
+            </a:r>
+            <a:r>
+              <a:rPr lang="en-US" dirty="0"/>
+              <a:t>]</a:t>
+            </a:r>
+            <a:endParaRPr lang="en-MY" dirty="0"/>
+          </a:p>
+        </p:txBody>
+      </p:sp>
+      <p:pic>
+        <p:nvPicPr>
+          <p:cNvPr id="4" name="Picture 3">
+            <a:extLst>
+              <a:ext uri="{FF2B5EF4-FFF2-40B4-BE49-F238E27FC236}">
+                <a16:creationId xmlns:a16="http://schemas.microsoft.com/office/drawing/2014/main" id="{CC001A90-EC98-0395-76A0-2A096686A0CD}"/>
+              </a:ext>
+            </a:extLst>
+          </p:cNvPr>
+          <p:cNvPicPr>
+            <a:picLocks noChangeAspect="1"/>
+          </p:cNvPicPr>
+          <p:nvPr/>
+        </p:nvPicPr>
+        <p:blipFill>
+          <a:blip r:embed="rId2"/>
+          <a:stretch>
+            <a:fillRect/>
+          </a:stretch>
+        </p:blipFill>
+        <p:spPr>
+          <a:xfrm>
+            <a:off x="9007578" y="6490317"/>
+            <a:ext cx="3077004" cy="247685"/>
+          </a:xfrm>
+          <a:prstGeom prst="rect">
+            <a:avLst/>
+          </a:prstGeom>
+        </p:spPr>
+      </p:pic>
+    </p:spTree>
+    <p:extLst>
+      <p:ext uri="{BB962C8B-B14F-4D97-AF65-F5344CB8AC3E}">
+        <p14:creationId xmlns:p14="http://schemas.microsoft.com/office/powerpoint/2010/main" val="90819464"/>
+      </p:ext>
+    </p:extLst>
+  </p:cSld>
+  <p:clrMapOvr>
+    <a:masterClrMapping/>
+  </p:clrMapOvr>
+</p:sld>
+</file>
+
+<file path=ppt/slides/slide5.xml><?xml version="1.0" encoding="utf-8"?>
+<p:sld xmlns:a="http://schemas.openxmlformats.org/drawingml/2006/main" xmlns:r="http://schemas.openxmlformats.org/officeDocument/2006/relationships" xmlns:p="http://schemas.openxmlformats.org/presentationml/2006/main">
+  <p:cSld>
+    <p:spTree>
+      <p:nvGrpSpPr>
+        <p:cNvPr id="1" name=""/>
+        <p:cNvGrpSpPr/>
+        <p:nvPr/>
+      </p:nvGrpSpPr>
+      <p:grpSpPr>
+        <a:xfrm>
+          <a:off x="0" y="0"/>
+          <a:ext cx="0" cy="0"/>
+          <a:chOff x="0" y="0"/>
+          <a:chExt cx="0" cy="0"/>
+        </a:xfrm>
+      </p:grpSpPr>
+      <p:sp>
+        <p:nvSpPr>
+          <p:cNvPr id="3" name="TextBox 2">
+            <a:extLst>
+              <a:ext uri="{FF2B5EF4-FFF2-40B4-BE49-F238E27FC236}">
+                <a16:creationId xmlns:a16="http://schemas.microsoft.com/office/drawing/2014/main" id="{352EF6C9-4EC7-CA04-897C-E9862C6F1239}"/>
+              </a:ext>
+            </a:extLst>
+          </p:cNvPr>
+          <p:cNvSpPr txBox="1"/>
+          <p:nvPr/>
+        </p:nvSpPr>
+        <p:spPr>
+          <a:xfrm>
+            <a:off x="560438" y="486697"/>
+            <a:ext cx="11282516" cy="873572"/>
+          </a:xfrm>
+          <a:prstGeom prst="rect">
+            <a:avLst/>
+          </a:prstGeom>
+          <a:noFill/>
+        </p:spPr>
+        <p:txBody>
+          <a:bodyPr wrap="square">
+            <a:spAutoFit/>
+          </a:bodyPr>
+          <a:lstStyle/>
+          <a:p>
+            <a:pPr marR="147320" lvl="0" algn="just">
+              <a:lnSpc>
+                <a:spcPct val="150000"/>
+              </a:lnSpc>
+              <a:tabLst>
+                <a:tab pos="554355" algn="l"/>
+              </a:tabLst>
+            </a:pPr>
+            <a:r>
+              <a:rPr lang="en-US" dirty="0">
+                <a:latin typeface="Times New Roman" panose="02020603050405020304" pitchFamily="18" charset="0"/>
+                <a:ea typeface="Times New Roman" panose="02020603050405020304" pitchFamily="18" charset="0"/>
+              </a:rPr>
+              <a:t>8</a:t>
+            </a:r>
+            <a:r>
+              <a:rPr lang="en-US" sz="1800" spc="0" dirty="0">
+                <a:effectLst/>
+                <a:latin typeface="Times New Roman" panose="02020603050405020304" pitchFamily="18" charset="0"/>
+                <a:ea typeface="Times New Roman" panose="02020603050405020304" pitchFamily="18" charset="0"/>
+              </a:rPr>
+              <a:t>   An electron beam S is accelerated from rest through a</a:t>
+            </a:r>
+            <a:r>
+              <a:rPr lang="en-US" sz="1800" spc="-5" dirty="0">
+                <a:effectLst/>
+                <a:latin typeface="Times New Roman" panose="02020603050405020304" pitchFamily="18" charset="0"/>
+                <a:ea typeface="Times New Roman" panose="02020603050405020304" pitchFamily="18" charset="0"/>
+              </a:rPr>
+              <a:t> </a:t>
+            </a:r>
+            <a:r>
+              <a:rPr lang="en-US" sz="1800" spc="0" dirty="0">
+                <a:effectLst/>
+                <a:latin typeface="Times New Roman" panose="02020603050405020304" pitchFamily="18" charset="0"/>
+                <a:ea typeface="Times New Roman" panose="02020603050405020304" pitchFamily="18" charset="0"/>
+              </a:rPr>
+              <a:t>potential difference of 500 V. Another</a:t>
+            </a:r>
+            <a:r>
+              <a:rPr lang="en-US" sz="1800" spc="-20" dirty="0">
+                <a:effectLst/>
+                <a:latin typeface="Times New Roman" panose="02020603050405020304" pitchFamily="18" charset="0"/>
+                <a:ea typeface="Times New Roman" panose="02020603050405020304" pitchFamily="18" charset="0"/>
+              </a:rPr>
+              <a:t> </a:t>
+            </a:r>
+            <a:r>
+              <a:rPr lang="en-US" sz="1800" spc="0" dirty="0">
+                <a:effectLst/>
+                <a:latin typeface="Times New Roman" panose="02020603050405020304" pitchFamily="18" charset="0"/>
+                <a:ea typeface="Times New Roman" panose="02020603050405020304" pitchFamily="18" charset="0"/>
+              </a:rPr>
+              <a:t>electron</a:t>
+            </a:r>
+            <a:r>
+              <a:rPr lang="en-US" sz="1800" spc="-20" dirty="0">
+                <a:effectLst/>
+                <a:latin typeface="Times New Roman" panose="02020603050405020304" pitchFamily="18" charset="0"/>
+                <a:ea typeface="Times New Roman" panose="02020603050405020304" pitchFamily="18" charset="0"/>
+              </a:rPr>
+              <a:t> </a:t>
+            </a:r>
+            <a:r>
+              <a:rPr lang="en-US" sz="1800" spc="0" dirty="0">
+                <a:effectLst/>
+                <a:latin typeface="Times New Roman" panose="02020603050405020304" pitchFamily="18" charset="0"/>
+                <a:ea typeface="Times New Roman" panose="02020603050405020304" pitchFamily="18" charset="0"/>
+              </a:rPr>
+              <a:t>beam,</a:t>
+            </a:r>
+            <a:r>
+              <a:rPr lang="en-US" sz="1800" spc="-20" dirty="0">
+                <a:effectLst/>
+                <a:latin typeface="Times New Roman" panose="02020603050405020304" pitchFamily="18" charset="0"/>
+                <a:ea typeface="Times New Roman" panose="02020603050405020304" pitchFamily="18" charset="0"/>
+              </a:rPr>
+              <a:t> </a:t>
+            </a:r>
+            <a:r>
+              <a:rPr lang="en-US" sz="1800" spc="0" dirty="0">
+                <a:effectLst/>
+                <a:latin typeface="Times New Roman" panose="02020603050405020304" pitchFamily="18" charset="0"/>
+                <a:ea typeface="Times New Roman" panose="02020603050405020304" pitchFamily="18" charset="0"/>
+              </a:rPr>
+              <a:t>T</a:t>
+            </a:r>
+            <a:r>
+              <a:rPr lang="en-US" sz="1800" spc="-20" dirty="0">
+                <a:effectLst/>
+                <a:latin typeface="Times New Roman" panose="02020603050405020304" pitchFamily="18" charset="0"/>
+                <a:ea typeface="Times New Roman" panose="02020603050405020304" pitchFamily="18" charset="0"/>
+              </a:rPr>
+              <a:t> </a:t>
+            </a:r>
+            <a:r>
+              <a:rPr lang="en-US" sz="1800" spc="0" dirty="0">
+                <a:effectLst/>
+                <a:latin typeface="Times New Roman" panose="02020603050405020304" pitchFamily="18" charset="0"/>
+                <a:ea typeface="Times New Roman" panose="02020603050405020304" pitchFamily="18" charset="0"/>
+              </a:rPr>
+              <a:t>is</a:t>
+            </a:r>
+            <a:r>
+              <a:rPr lang="en-US" sz="1800" spc="-20" dirty="0">
+                <a:effectLst/>
+                <a:latin typeface="Times New Roman" panose="02020603050405020304" pitchFamily="18" charset="0"/>
+                <a:ea typeface="Times New Roman" panose="02020603050405020304" pitchFamily="18" charset="0"/>
+              </a:rPr>
+              <a:t> </a:t>
+            </a:r>
+            <a:r>
+              <a:rPr lang="en-US" sz="1800" spc="0" dirty="0">
+                <a:effectLst/>
+                <a:latin typeface="Times New Roman" panose="02020603050405020304" pitchFamily="18" charset="0"/>
+                <a:ea typeface="Times New Roman" panose="02020603050405020304" pitchFamily="18" charset="0"/>
+              </a:rPr>
+              <a:t>also</a:t>
+            </a:r>
+            <a:r>
+              <a:rPr lang="en-US" sz="1800" spc="-20" dirty="0">
+                <a:effectLst/>
+                <a:latin typeface="Times New Roman" panose="02020603050405020304" pitchFamily="18" charset="0"/>
+                <a:ea typeface="Times New Roman" panose="02020603050405020304" pitchFamily="18" charset="0"/>
+              </a:rPr>
+              <a:t> </a:t>
+            </a:r>
+            <a:r>
+              <a:rPr lang="en-US" sz="1800" spc="0" dirty="0">
+                <a:effectLst/>
+                <a:latin typeface="Times New Roman" panose="02020603050405020304" pitchFamily="18" charset="0"/>
+                <a:ea typeface="Times New Roman" panose="02020603050405020304" pitchFamily="18" charset="0"/>
+              </a:rPr>
+              <a:t>accelerated</a:t>
+            </a:r>
+            <a:r>
+              <a:rPr lang="en-US" sz="1800" spc="-15" dirty="0">
+                <a:effectLst/>
+                <a:latin typeface="Times New Roman" panose="02020603050405020304" pitchFamily="18" charset="0"/>
+                <a:ea typeface="Times New Roman" panose="02020603050405020304" pitchFamily="18" charset="0"/>
+              </a:rPr>
+              <a:t> </a:t>
+            </a:r>
+            <a:r>
+              <a:rPr lang="en-US" sz="1800" spc="0" dirty="0">
+                <a:effectLst/>
+                <a:latin typeface="Times New Roman" panose="02020603050405020304" pitchFamily="18" charset="0"/>
+                <a:ea typeface="Times New Roman" panose="02020603050405020304" pitchFamily="18" charset="0"/>
+              </a:rPr>
+              <a:t>from</a:t>
+            </a:r>
+            <a:r>
+              <a:rPr lang="en-US" sz="1800" spc="-20" dirty="0">
+                <a:effectLst/>
+                <a:latin typeface="Times New Roman" panose="02020603050405020304" pitchFamily="18" charset="0"/>
+                <a:ea typeface="Times New Roman" panose="02020603050405020304" pitchFamily="18" charset="0"/>
+              </a:rPr>
+              <a:t> </a:t>
+            </a:r>
+            <a:r>
+              <a:rPr lang="en-US" sz="1800" spc="0" dirty="0">
+                <a:effectLst/>
+                <a:latin typeface="Times New Roman" panose="02020603050405020304" pitchFamily="18" charset="0"/>
+                <a:ea typeface="Times New Roman" panose="02020603050405020304" pitchFamily="18" charset="0"/>
+              </a:rPr>
+              <a:t>rest</a:t>
+            </a:r>
+            <a:r>
+              <a:rPr lang="en-US" sz="1800" spc="-20" dirty="0">
+                <a:effectLst/>
+                <a:latin typeface="Times New Roman" panose="02020603050405020304" pitchFamily="18" charset="0"/>
+                <a:ea typeface="Times New Roman" panose="02020603050405020304" pitchFamily="18" charset="0"/>
+              </a:rPr>
+              <a:t> </a:t>
+            </a:r>
+            <a:r>
+              <a:rPr lang="en-US" sz="1800" spc="0" dirty="0">
+                <a:effectLst/>
+                <a:latin typeface="Times New Roman" panose="02020603050405020304" pitchFamily="18" charset="0"/>
+                <a:ea typeface="Times New Roman" panose="02020603050405020304" pitchFamily="18" charset="0"/>
+              </a:rPr>
+              <a:t>through</a:t>
+            </a:r>
+            <a:r>
+              <a:rPr lang="en-US" sz="1800" spc="-20" dirty="0">
+                <a:effectLst/>
+                <a:latin typeface="Times New Roman" panose="02020603050405020304" pitchFamily="18" charset="0"/>
+                <a:ea typeface="Times New Roman" panose="02020603050405020304" pitchFamily="18" charset="0"/>
+              </a:rPr>
+              <a:t> </a:t>
+            </a:r>
+            <a:r>
+              <a:rPr lang="en-US" sz="1800" spc="0" dirty="0">
+                <a:effectLst/>
+                <a:latin typeface="Times New Roman" panose="02020603050405020304" pitchFamily="18" charset="0"/>
+                <a:ea typeface="Times New Roman" panose="02020603050405020304" pitchFamily="18" charset="0"/>
+              </a:rPr>
+              <a:t>a</a:t>
+            </a:r>
+            <a:r>
+              <a:rPr lang="en-US" sz="1800" spc="-25" dirty="0">
+                <a:effectLst/>
+                <a:latin typeface="Times New Roman" panose="02020603050405020304" pitchFamily="18" charset="0"/>
+                <a:ea typeface="Times New Roman" panose="02020603050405020304" pitchFamily="18" charset="0"/>
+              </a:rPr>
+              <a:t> </a:t>
+            </a:r>
+            <a:r>
+              <a:rPr lang="en-US" sz="1800" spc="0" dirty="0">
+                <a:effectLst/>
+                <a:latin typeface="Times New Roman" panose="02020603050405020304" pitchFamily="18" charset="0"/>
+                <a:ea typeface="Times New Roman" panose="02020603050405020304" pitchFamily="18" charset="0"/>
+              </a:rPr>
+              <a:t>potential difference of 1000 V. Find the ratio between the wavelengths of S to T.</a:t>
+            </a:r>
+            <a:endParaRPr lang="en-MY" sz="1600" spc="0" dirty="0">
+              <a:effectLst/>
+              <a:latin typeface="Times New Roman" panose="02020603050405020304" pitchFamily="18" charset="0"/>
+              <a:ea typeface="Times New Roman" panose="02020603050405020304" pitchFamily="18" charset="0"/>
+            </a:endParaRPr>
+          </a:p>
+        </p:txBody>
+      </p:sp>
+      <p:pic>
+        <p:nvPicPr>
+          <p:cNvPr id="5" name="Picture 4">
+            <a:extLst>
+              <a:ext uri="{FF2B5EF4-FFF2-40B4-BE49-F238E27FC236}">
+                <a16:creationId xmlns:a16="http://schemas.microsoft.com/office/drawing/2014/main" id="{4A0E5EE1-C26F-09C6-D747-9CC6D186FB8F}"/>
+              </a:ext>
+            </a:extLst>
+          </p:cNvPr>
+          <p:cNvPicPr>
+            <a:picLocks noChangeAspect="1"/>
+          </p:cNvPicPr>
+          <p:nvPr/>
+        </p:nvPicPr>
+        <p:blipFill>
+          <a:blip r:embed="rId2"/>
+          <a:stretch>
+            <a:fillRect/>
+          </a:stretch>
+        </p:blipFill>
+        <p:spPr>
+          <a:xfrm>
+            <a:off x="560438" y="5667021"/>
+            <a:ext cx="3105583" cy="590632"/>
+          </a:xfrm>
+          <a:prstGeom prst="rect">
+            <a:avLst/>
+          </a:prstGeom>
+        </p:spPr>
+      </p:pic>
+    </p:spTree>
+    <p:extLst>
+      <p:ext uri="{BB962C8B-B14F-4D97-AF65-F5344CB8AC3E}">
+        <p14:creationId xmlns:p14="http://schemas.microsoft.com/office/powerpoint/2010/main" val="516180890"/>
+      </p:ext>
+    </p:extLst>
+  </p:cSld>
+  <p:clrMapOvr>
+    <a:masterClrMapping/>
+  </p:clrMapOvr>
+</p:sld>
+</file>
+
+<file path=ppt/slides/slide6.xml><?xml version="1.0" encoding="utf-8"?>
+<p:sld xmlns:a="http://schemas.openxmlformats.org/drawingml/2006/main" xmlns:r="http://schemas.openxmlformats.org/officeDocument/2006/relationships" xmlns:p="http://schemas.openxmlformats.org/presentationml/2006/main">
+  <p:cSld>
+    <p:spTree>
+      <p:nvGrpSpPr>
+        <p:cNvPr id="1" name=""/>
+        <p:cNvGrpSpPr/>
+        <p:nvPr/>
+      </p:nvGrpSpPr>
+      <p:grpSpPr>
+        <a:xfrm>
+          <a:off x="0" y="0"/>
+          <a:ext cx="0" cy="0"/>
+          <a:chOff x="0" y="0"/>
+          <a:chExt cx="0" cy="0"/>
+        </a:xfrm>
+      </p:grpSpPr>
+      <p:sp>
+        <p:nvSpPr>
+          <p:cNvPr id="3" name="TextBox 2">
+            <a:extLst>
+              <a:ext uri="{FF2B5EF4-FFF2-40B4-BE49-F238E27FC236}">
+                <a16:creationId xmlns:a16="http://schemas.microsoft.com/office/drawing/2014/main" id="{A3D945AA-4F4A-50E5-CFB0-7FC8F190F8B8}"/>
+              </a:ext>
+            </a:extLst>
+          </p:cNvPr>
+          <p:cNvSpPr txBox="1"/>
+          <p:nvPr/>
+        </p:nvSpPr>
+        <p:spPr>
+          <a:xfrm>
+            <a:off x="436728" y="509602"/>
+            <a:ext cx="10986447" cy="2308324"/>
+          </a:xfrm>
+          <a:prstGeom prst="rect">
+            <a:avLst/>
+          </a:prstGeom>
+          <a:noFill/>
+        </p:spPr>
+        <p:txBody>
+          <a:bodyPr wrap="square">
+            <a:spAutoFit/>
+          </a:bodyPr>
+          <a:lstStyle/>
+          <a:p>
+            <a:pPr>
+              <a:buNone/>
+            </a:pPr>
+            <a:r>
+              <a:rPr lang="en-MY" dirty="0">
+                <a:solidFill>
+                  <a:srgbClr val="000000"/>
+                </a:solidFill>
+                <a:latin typeface="Times New Roman" panose="02020603050405020304" pitchFamily="18" charset="0"/>
+                <a:ea typeface="Aptos" panose="020B0004020202020204" pitchFamily="34" charset="0"/>
+              </a:rPr>
+              <a:t>8</a:t>
+            </a:r>
+            <a:r>
+              <a:rPr lang="en-MY" sz="1800" dirty="0">
+                <a:solidFill>
+                  <a:srgbClr val="000000"/>
+                </a:solidFill>
+                <a:effectLst/>
+                <a:latin typeface="Times New Roman" panose="02020603050405020304" pitchFamily="18" charset="0"/>
+                <a:ea typeface="Aptos" panose="020B0004020202020204" pitchFamily="34" charset="0"/>
+              </a:rPr>
+              <a:t> (a) What is the wavelength of a photon that has the same momentum as an electron moving with a speed of         1100 ms</a:t>
+            </a:r>
+            <a:r>
+              <a:rPr lang="en-MY" sz="1800" baseline="30000" dirty="0">
+                <a:solidFill>
+                  <a:srgbClr val="000000"/>
+                </a:solidFill>
+                <a:effectLst/>
+                <a:latin typeface="Times New Roman" panose="02020603050405020304" pitchFamily="18" charset="0"/>
+                <a:ea typeface="Aptos" panose="020B0004020202020204" pitchFamily="34" charset="0"/>
+              </a:rPr>
+              <a:t>-1</a:t>
+            </a:r>
+            <a:r>
+              <a:rPr lang="en-MY" sz="1800" dirty="0">
+                <a:solidFill>
+                  <a:srgbClr val="000000"/>
+                </a:solidFill>
+                <a:effectLst/>
+                <a:latin typeface="Times New Roman" panose="02020603050405020304" pitchFamily="18" charset="0"/>
+                <a:ea typeface="Aptos" panose="020B0004020202020204" pitchFamily="34" charset="0"/>
+              </a:rPr>
+              <a:t> ?																				[2 </a:t>
+            </a:r>
+            <a:r>
+              <a:rPr lang="en-MY" sz="1800" i="1" dirty="0">
+                <a:solidFill>
+                  <a:srgbClr val="000000"/>
+                </a:solidFill>
+                <a:effectLst/>
+                <a:latin typeface="Times New Roman" panose="02020603050405020304" pitchFamily="18" charset="0"/>
+                <a:ea typeface="Aptos" panose="020B0004020202020204" pitchFamily="34" charset="0"/>
+              </a:rPr>
+              <a:t>marks</a:t>
+            </a:r>
+            <a:r>
+              <a:rPr lang="en-MY" sz="1800" dirty="0">
+                <a:solidFill>
+                  <a:srgbClr val="000000"/>
+                </a:solidFill>
+                <a:effectLst/>
+                <a:latin typeface="Times New Roman" panose="02020603050405020304" pitchFamily="18" charset="0"/>
+                <a:ea typeface="Aptos" panose="020B0004020202020204" pitchFamily="34" charset="0"/>
+              </a:rPr>
+              <a:t>] </a:t>
+            </a:r>
+            <a:endParaRPr lang="en-MY" sz="2000" dirty="0">
+              <a:solidFill>
+                <a:srgbClr val="000000"/>
+              </a:solidFill>
+              <a:effectLst/>
+              <a:latin typeface="Times New Roman" panose="02020603050405020304" pitchFamily="18" charset="0"/>
+              <a:ea typeface="Aptos" panose="020B0004020202020204" pitchFamily="34" charset="0"/>
+            </a:endParaRPr>
+          </a:p>
+          <a:p>
+            <a:pPr>
+              <a:buNone/>
+            </a:pPr>
+            <a:r>
+              <a:rPr lang="en-MY" sz="1800" dirty="0">
+                <a:solidFill>
+                  <a:srgbClr val="000000"/>
+                </a:solidFill>
+                <a:effectLst/>
+                <a:latin typeface="Times New Roman" panose="02020603050405020304" pitchFamily="18" charset="0"/>
+                <a:ea typeface="Aptos" panose="020B0004020202020204" pitchFamily="34" charset="0"/>
+              </a:rPr>
+              <a:t> </a:t>
+            </a:r>
+            <a:endParaRPr lang="en-MY" sz="2000" dirty="0">
+              <a:solidFill>
+                <a:srgbClr val="000000"/>
+              </a:solidFill>
+              <a:effectLst/>
+              <a:latin typeface="Times New Roman" panose="02020603050405020304" pitchFamily="18" charset="0"/>
+              <a:ea typeface="Aptos" panose="020B0004020202020204" pitchFamily="34" charset="0"/>
+            </a:endParaRPr>
+          </a:p>
+          <a:p>
+            <a:pPr>
+              <a:buNone/>
+            </a:pPr>
+            <a:r>
+              <a:rPr lang="en-MY" sz="1800" dirty="0">
+                <a:solidFill>
+                  <a:srgbClr val="000000"/>
+                </a:solidFill>
+                <a:effectLst/>
+                <a:latin typeface="Times New Roman" panose="02020603050405020304" pitchFamily="18" charset="0"/>
+                <a:ea typeface="Aptos" panose="020B0004020202020204" pitchFamily="34" charset="0"/>
+              </a:rPr>
+              <a:t>(b) The non-relativistic electron beam in an electron microscope is formed by a setup similar to the electron gun used in the Davisson–Germer experiment. What is the voltage needed to accelerate an electron which has de Broglie wavelength of 0.25 nm? 																			[1 </a:t>
+            </a:r>
+            <a:r>
+              <a:rPr lang="en-MY" sz="1800" i="1" dirty="0">
+                <a:solidFill>
+                  <a:srgbClr val="000000"/>
+                </a:solidFill>
+                <a:effectLst/>
+                <a:latin typeface="Times New Roman" panose="02020603050405020304" pitchFamily="18" charset="0"/>
+                <a:ea typeface="Aptos" panose="020B0004020202020204" pitchFamily="34" charset="0"/>
+              </a:rPr>
+              <a:t>marks</a:t>
+            </a:r>
+            <a:r>
+              <a:rPr lang="en-MY" sz="1800" dirty="0">
+                <a:solidFill>
+                  <a:srgbClr val="000000"/>
+                </a:solidFill>
+                <a:effectLst/>
+                <a:latin typeface="Times New Roman" panose="02020603050405020304" pitchFamily="18" charset="0"/>
+                <a:ea typeface="Aptos" panose="020B0004020202020204" pitchFamily="34" charset="0"/>
+              </a:rPr>
+              <a:t>] </a:t>
+            </a:r>
+            <a:endParaRPr lang="en-MY" sz="2000" dirty="0">
+              <a:solidFill>
+                <a:srgbClr val="000000"/>
+              </a:solidFill>
+              <a:effectLst/>
+              <a:latin typeface="Times New Roman" panose="02020603050405020304" pitchFamily="18" charset="0"/>
+              <a:ea typeface="Aptos" panose="020B0004020202020204" pitchFamily="34" charset="0"/>
+            </a:endParaRPr>
+          </a:p>
+        </p:txBody>
+      </p:sp>
+      <p:pic>
+        <p:nvPicPr>
+          <p:cNvPr id="5" name="Picture 4">
+            <a:extLst>
+              <a:ext uri="{FF2B5EF4-FFF2-40B4-BE49-F238E27FC236}">
+                <a16:creationId xmlns:a16="http://schemas.microsoft.com/office/drawing/2014/main" id="{2B9B1FF7-E4E0-E35E-1CF7-25930030C919}"/>
+              </a:ext>
+            </a:extLst>
+          </p:cNvPr>
+          <p:cNvPicPr>
+            <a:picLocks noChangeAspect="1"/>
+          </p:cNvPicPr>
+          <p:nvPr/>
+        </p:nvPicPr>
+        <p:blipFill>
+          <a:blip r:embed="rId2"/>
+          <a:stretch>
+            <a:fillRect/>
+          </a:stretch>
+        </p:blipFill>
+        <p:spPr>
+          <a:xfrm>
+            <a:off x="8111568" y="5391734"/>
+            <a:ext cx="3134162" cy="571580"/>
+          </a:xfrm>
+          <a:prstGeom prst="rect">
+            <a:avLst/>
+          </a:prstGeom>
+        </p:spPr>
+      </p:pic>
+    </p:spTree>
+    <p:extLst>
+      <p:ext uri="{BB962C8B-B14F-4D97-AF65-F5344CB8AC3E}">
+        <p14:creationId xmlns:p14="http://schemas.microsoft.com/office/powerpoint/2010/main" val="3773365115"/>
+      </p:ext>
+    </p:extLst>
+  </p:cSld>
+  <p:clrMapOvr>
+    <a:masterClrMapping/>
+  </p:clrMapOvr>
+</p:sld>
+</file>
+
+<file path=ppt/slides/slide7.xml><?xml version="1.0" encoding="utf-8"?>
+<p:sld xmlns:a="http://schemas.openxmlformats.org/drawingml/2006/main" xmlns:r="http://schemas.openxmlformats.org/officeDocument/2006/relationships" xmlns:p="http://schemas.openxmlformats.org/presentationml/2006/main">
+  <p:cSld>
+    <p:spTree>
+      <p:nvGrpSpPr>
+        <p:cNvPr id="1" name=""/>
+        <p:cNvGrpSpPr/>
+        <p:nvPr/>
+      </p:nvGrpSpPr>
+      <p:grpSpPr>
+        <a:xfrm>
+          <a:off x="0" y="0"/>
+          <a:ext cx="0" cy="0"/>
+          <a:chOff x="0" y="0"/>
+          <a:chExt cx="0" cy="0"/>
+        </a:xfrm>
+      </p:grpSpPr>
+      <p:sp>
+        <p:nvSpPr>
+          <p:cNvPr id="3" name="TextBox 2">
+            <a:extLst>
+              <a:ext uri="{FF2B5EF4-FFF2-40B4-BE49-F238E27FC236}">
+                <a16:creationId xmlns:a16="http://schemas.microsoft.com/office/drawing/2014/main" id="{84107805-F602-9A06-DB3F-952545987EF9}"/>
+              </a:ext>
+            </a:extLst>
+          </p:cNvPr>
+          <p:cNvSpPr txBox="1"/>
+          <p:nvPr/>
+        </p:nvSpPr>
+        <p:spPr>
+          <a:xfrm>
+            <a:off x="766916" y="929855"/>
+            <a:ext cx="10309123" cy="1754326"/>
+          </a:xfrm>
+          <a:prstGeom prst="rect">
+            <a:avLst/>
+          </a:prstGeom>
+          <a:noFill/>
+        </p:spPr>
+        <p:txBody>
+          <a:bodyPr wrap="square">
+            <a:spAutoFit/>
+          </a:bodyPr>
+          <a:lstStyle/>
+          <a:p>
+            <a:pPr lvl="0">
+              <a:spcBef>
+                <a:spcPts val="1235"/>
+              </a:spcBef>
+              <a:tabLst>
+                <a:tab pos="650240" algn="l"/>
+                <a:tab pos="950595" algn="l"/>
+              </a:tabLst>
+            </a:pPr>
+            <a:r>
+              <a:rPr lang="ms-MY" sz="1800" spc="-25" dirty="0">
+                <a:effectLst/>
+                <a:latin typeface="Times New Roman" panose="02020603050405020304" pitchFamily="18" charset="0"/>
+                <a:ea typeface="Times New Roman" panose="02020603050405020304" pitchFamily="18" charset="0"/>
+              </a:rPr>
+              <a:t>8(a)</a:t>
+            </a:r>
+            <a:r>
+              <a:rPr lang="ms-MY" sz="1800" spc="0" dirty="0">
+                <a:effectLst/>
+                <a:latin typeface="Times New Roman" panose="02020603050405020304" pitchFamily="18" charset="0"/>
+                <a:ea typeface="Times New Roman" panose="02020603050405020304" pitchFamily="18" charset="0"/>
+              </a:rPr>
+              <a:t>	What</a:t>
+            </a:r>
+            <a:r>
+              <a:rPr lang="ms-MY" sz="1800" spc="55" dirty="0">
+                <a:effectLst/>
+                <a:latin typeface="Times New Roman" panose="02020603050405020304" pitchFamily="18" charset="0"/>
+                <a:ea typeface="Times New Roman" panose="02020603050405020304" pitchFamily="18" charset="0"/>
+              </a:rPr>
+              <a:t> </a:t>
+            </a:r>
+            <a:r>
+              <a:rPr lang="ms-MY" sz="1800" spc="0" dirty="0">
+                <a:effectLst/>
+                <a:latin typeface="Times New Roman" panose="02020603050405020304" pitchFamily="18" charset="0"/>
+                <a:ea typeface="Times New Roman" panose="02020603050405020304" pitchFamily="18" charset="0"/>
+              </a:rPr>
+              <a:t>is</a:t>
+            </a:r>
+            <a:r>
+              <a:rPr lang="ms-MY" sz="1800" spc="65" dirty="0">
+                <a:effectLst/>
+                <a:latin typeface="Times New Roman" panose="02020603050405020304" pitchFamily="18" charset="0"/>
+                <a:ea typeface="Times New Roman" panose="02020603050405020304" pitchFamily="18" charset="0"/>
+              </a:rPr>
+              <a:t> </a:t>
+            </a:r>
+            <a:r>
+              <a:rPr lang="ms-MY" sz="1800" spc="0" dirty="0">
+                <a:effectLst/>
+                <a:latin typeface="Times New Roman" panose="02020603050405020304" pitchFamily="18" charset="0"/>
+                <a:ea typeface="Times New Roman" panose="02020603050405020304" pitchFamily="18" charset="0"/>
+              </a:rPr>
+              <a:t>the</a:t>
+            </a:r>
+            <a:r>
+              <a:rPr lang="ms-MY" sz="1800" spc="75" dirty="0">
+                <a:effectLst/>
+                <a:latin typeface="Times New Roman" panose="02020603050405020304" pitchFamily="18" charset="0"/>
+                <a:ea typeface="Times New Roman" panose="02020603050405020304" pitchFamily="18" charset="0"/>
+              </a:rPr>
+              <a:t> </a:t>
+            </a:r>
+            <a:r>
+              <a:rPr lang="ms-MY" sz="1800" spc="0" dirty="0">
+                <a:effectLst/>
+                <a:latin typeface="Times New Roman" panose="02020603050405020304" pitchFamily="18" charset="0"/>
+                <a:ea typeface="Times New Roman" panose="02020603050405020304" pitchFamily="18" charset="0"/>
+              </a:rPr>
+              <a:t>wavelength</a:t>
+            </a:r>
+            <a:r>
+              <a:rPr lang="ms-MY" sz="1800" spc="70" dirty="0">
+                <a:effectLst/>
+                <a:latin typeface="Times New Roman" panose="02020603050405020304" pitchFamily="18" charset="0"/>
+                <a:ea typeface="Times New Roman" panose="02020603050405020304" pitchFamily="18" charset="0"/>
+              </a:rPr>
+              <a:t> </a:t>
+            </a:r>
+            <a:r>
+              <a:rPr lang="ms-MY" sz="1800" spc="0" dirty="0">
+                <a:effectLst/>
+                <a:latin typeface="Times New Roman" panose="02020603050405020304" pitchFamily="18" charset="0"/>
+                <a:ea typeface="Times New Roman" panose="02020603050405020304" pitchFamily="18" charset="0"/>
+              </a:rPr>
+              <a:t>of</a:t>
+            </a:r>
+            <a:r>
+              <a:rPr lang="ms-MY" sz="1800" spc="65" dirty="0">
+                <a:effectLst/>
+                <a:latin typeface="Times New Roman" panose="02020603050405020304" pitchFamily="18" charset="0"/>
+                <a:ea typeface="Times New Roman" panose="02020603050405020304" pitchFamily="18" charset="0"/>
+              </a:rPr>
+              <a:t> </a:t>
+            </a:r>
+            <a:r>
+              <a:rPr lang="ms-MY" sz="1800" spc="0" dirty="0">
+                <a:effectLst/>
+                <a:latin typeface="Times New Roman" panose="02020603050405020304" pitchFamily="18" charset="0"/>
+                <a:ea typeface="Times New Roman" panose="02020603050405020304" pitchFamily="18" charset="0"/>
+              </a:rPr>
+              <a:t>a</a:t>
+            </a:r>
+            <a:r>
+              <a:rPr lang="ms-MY" sz="1800" spc="75" dirty="0">
+                <a:effectLst/>
+                <a:latin typeface="Times New Roman" panose="02020603050405020304" pitchFamily="18" charset="0"/>
+                <a:ea typeface="Times New Roman" panose="02020603050405020304" pitchFamily="18" charset="0"/>
+              </a:rPr>
+              <a:t> </a:t>
+            </a:r>
+            <a:r>
+              <a:rPr lang="ms-MY" sz="1800" spc="0" dirty="0">
+                <a:effectLst/>
+                <a:latin typeface="Times New Roman" panose="02020603050405020304" pitchFamily="18" charset="0"/>
+                <a:ea typeface="Times New Roman" panose="02020603050405020304" pitchFamily="18" charset="0"/>
+              </a:rPr>
+              <a:t>photon</a:t>
+            </a:r>
+            <a:r>
+              <a:rPr lang="ms-MY" sz="1800" spc="70" dirty="0">
+                <a:effectLst/>
+                <a:latin typeface="Times New Roman" panose="02020603050405020304" pitchFamily="18" charset="0"/>
+                <a:ea typeface="Times New Roman" panose="02020603050405020304" pitchFamily="18" charset="0"/>
+              </a:rPr>
+              <a:t> </a:t>
+            </a:r>
+            <a:r>
+              <a:rPr lang="ms-MY" sz="1800" spc="0" dirty="0">
+                <a:effectLst/>
+                <a:latin typeface="Times New Roman" panose="02020603050405020304" pitchFamily="18" charset="0"/>
+                <a:ea typeface="Times New Roman" panose="02020603050405020304" pitchFamily="18" charset="0"/>
+              </a:rPr>
+              <a:t>that</a:t>
+            </a:r>
+            <a:r>
+              <a:rPr lang="ms-MY" sz="1800" spc="70" dirty="0">
+                <a:effectLst/>
+                <a:latin typeface="Times New Roman" panose="02020603050405020304" pitchFamily="18" charset="0"/>
+                <a:ea typeface="Times New Roman" panose="02020603050405020304" pitchFamily="18" charset="0"/>
+              </a:rPr>
+              <a:t> </a:t>
+            </a:r>
+            <a:r>
+              <a:rPr lang="ms-MY" sz="1800" spc="0" dirty="0">
+                <a:effectLst/>
+                <a:latin typeface="Times New Roman" panose="02020603050405020304" pitchFamily="18" charset="0"/>
+                <a:ea typeface="Times New Roman" panose="02020603050405020304" pitchFamily="18" charset="0"/>
+              </a:rPr>
+              <a:t>has</a:t>
+            </a:r>
+            <a:r>
+              <a:rPr lang="ms-MY" sz="1800" spc="75" dirty="0">
+                <a:effectLst/>
+                <a:latin typeface="Times New Roman" panose="02020603050405020304" pitchFamily="18" charset="0"/>
+                <a:ea typeface="Times New Roman" panose="02020603050405020304" pitchFamily="18" charset="0"/>
+              </a:rPr>
+              <a:t> </a:t>
+            </a:r>
+            <a:r>
+              <a:rPr lang="ms-MY" sz="1800" spc="0" dirty="0">
+                <a:effectLst/>
+                <a:latin typeface="Times New Roman" panose="02020603050405020304" pitchFamily="18" charset="0"/>
+                <a:ea typeface="Times New Roman" panose="02020603050405020304" pitchFamily="18" charset="0"/>
+              </a:rPr>
+              <a:t>the</a:t>
+            </a:r>
+            <a:r>
+              <a:rPr lang="ms-MY" sz="1800" spc="65" dirty="0">
+                <a:effectLst/>
+                <a:latin typeface="Times New Roman" panose="02020603050405020304" pitchFamily="18" charset="0"/>
+                <a:ea typeface="Times New Roman" panose="02020603050405020304" pitchFamily="18" charset="0"/>
+              </a:rPr>
+              <a:t> </a:t>
+            </a:r>
+            <a:r>
+              <a:rPr lang="ms-MY" sz="1800" spc="0" dirty="0">
+                <a:effectLst/>
+                <a:latin typeface="Times New Roman" panose="02020603050405020304" pitchFamily="18" charset="0"/>
+                <a:ea typeface="Times New Roman" panose="02020603050405020304" pitchFamily="18" charset="0"/>
+              </a:rPr>
+              <a:t>same</a:t>
+            </a:r>
+            <a:r>
+              <a:rPr lang="ms-MY" sz="1800" spc="60" dirty="0">
+                <a:effectLst/>
+                <a:latin typeface="Times New Roman" panose="02020603050405020304" pitchFamily="18" charset="0"/>
+                <a:ea typeface="Times New Roman" panose="02020603050405020304" pitchFamily="18" charset="0"/>
+              </a:rPr>
+              <a:t> </a:t>
+            </a:r>
+            <a:r>
+              <a:rPr lang="ms-MY" sz="1800" spc="0" dirty="0">
+                <a:effectLst/>
+                <a:latin typeface="Times New Roman" panose="02020603050405020304" pitchFamily="18" charset="0"/>
+                <a:ea typeface="Times New Roman" panose="02020603050405020304" pitchFamily="18" charset="0"/>
+              </a:rPr>
+              <a:t>momentum</a:t>
+            </a:r>
+            <a:r>
+              <a:rPr lang="ms-MY" sz="1800" spc="75" dirty="0">
+                <a:effectLst/>
+                <a:latin typeface="Times New Roman" panose="02020603050405020304" pitchFamily="18" charset="0"/>
+                <a:ea typeface="Times New Roman" panose="02020603050405020304" pitchFamily="18" charset="0"/>
+              </a:rPr>
+              <a:t> </a:t>
+            </a:r>
+            <a:r>
+              <a:rPr lang="ms-MY" sz="1800" spc="0" dirty="0">
+                <a:effectLst/>
+                <a:latin typeface="Times New Roman" panose="02020603050405020304" pitchFamily="18" charset="0"/>
+                <a:ea typeface="Times New Roman" panose="02020603050405020304" pitchFamily="18" charset="0"/>
+              </a:rPr>
+              <a:t>as</a:t>
+            </a:r>
+            <a:r>
+              <a:rPr lang="ms-MY" sz="1800" spc="70" dirty="0">
+                <a:effectLst/>
+                <a:latin typeface="Times New Roman" panose="02020603050405020304" pitchFamily="18" charset="0"/>
+                <a:ea typeface="Times New Roman" panose="02020603050405020304" pitchFamily="18" charset="0"/>
+              </a:rPr>
+              <a:t> </a:t>
+            </a:r>
+            <a:r>
+              <a:rPr lang="ms-MY" sz="1800" spc="0" dirty="0">
+                <a:effectLst/>
+                <a:latin typeface="Times New Roman" panose="02020603050405020304" pitchFamily="18" charset="0"/>
+                <a:ea typeface="Times New Roman" panose="02020603050405020304" pitchFamily="18" charset="0"/>
+              </a:rPr>
+              <a:t>an</a:t>
+            </a:r>
+            <a:r>
+              <a:rPr lang="ms-MY" sz="1800" spc="75" dirty="0">
+                <a:effectLst/>
+                <a:latin typeface="Times New Roman" panose="02020603050405020304" pitchFamily="18" charset="0"/>
+                <a:ea typeface="Times New Roman" panose="02020603050405020304" pitchFamily="18" charset="0"/>
+              </a:rPr>
+              <a:t> </a:t>
+            </a:r>
+            <a:r>
+              <a:rPr lang="ms-MY" sz="1800" spc="0" dirty="0">
+                <a:effectLst/>
+                <a:latin typeface="Times New Roman" panose="02020603050405020304" pitchFamily="18" charset="0"/>
+                <a:ea typeface="Times New Roman" panose="02020603050405020304" pitchFamily="18" charset="0"/>
+              </a:rPr>
+              <a:t>electron</a:t>
+            </a:r>
+            <a:r>
+              <a:rPr lang="ms-MY" sz="1800" spc="65" dirty="0">
+                <a:effectLst/>
+                <a:latin typeface="Times New Roman" panose="02020603050405020304" pitchFamily="18" charset="0"/>
+                <a:ea typeface="Times New Roman" panose="02020603050405020304" pitchFamily="18" charset="0"/>
+              </a:rPr>
+              <a:t> </a:t>
+            </a:r>
+            <a:r>
+              <a:rPr lang="ms-MY" sz="1800" spc="-10" dirty="0">
+                <a:effectLst/>
+                <a:latin typeface="Times New Roman" panose="02020603050405020304" pitchFamily="18" charset="0"/>
+                <a:ea typeface="Times New Roman" panose="02020603050405020304" pitchFamily="18" charset="0"/>
+              </a:rPr>
+              <a:t>moving </a:t>
+            </a:r>
+            <a:r>
+              <a:rPr lang="ms-MY" sz="1800" dirty="0">
+                <a:effectLst/>
+                <a:latin typeface="Times New Roman" panose="02020603050405020304" pitchFamily="18" charset="0"/>
+                <a:ea typeface="Times New Roman" panose="02020603050405020304" pitchFamily="18" charset="0"/>
+              </a:rPr>
+              <a:t>with</a:t>
+            </a:r>
+            <a:r>
+              <a:rPr lang="ms-MY" sz="1800" spc="-5" dirty="0">
+                <a:effectLst/>
+                <a:latin typeface="Times New Roman" panose="02020603050405020304" pitchFamily="18" charset="0"/>
+                <a:ea typeface="Times New Roman" panose="02020603050405020304" pitchFamily="18" charset="0"/>
+              </a:rPr>
+              <a:t> </a:t>
+            </a:r>
+            <a:r>
+              <a:rPr lang="ms-MY" sz="1800" dirty="0">
+                <a:effectLst/>
+                <a:latin typeface="Times New Roman" panose="02020603050405020304" pitchFamily="18" charset="0"/>
+                <a:ea typeface="Times New Roman" panose="02020603050405020304" pitchFamily="18" charset="0"/>
+              </a:rPr>
+              <a:t>a</a:t>
+            </a:r>
+            <a:r>
+              <a:rPr lang="ms-MY" sz="1800" spc="-15" dirty="0">
+                <a:effectLst/>
+                <a:latin typeface="Times New Roman" panose="02020603050405020304" pitchFamily="18" charset="0"/>
+                <a:ea typeface="Times New Roman" panose="02020603050405020304" pitchFamily="18" charset="0"/>
+              </a:rPr>
+              <a:t> </a:t>
+            </a:r>
+            <a:r>
+              <a:rPr lang="ms-MY" sz="1800" dirty="0">
+                <a:effectLst/>
+                <a:latin typeface="Times New Roman" panose="02020603050405020304" pitchFamily="18" charset="0"/>
+                <a:ea typeface="Times New Roman" panose="02020603050405020304" pitchFamily="18" charset="0"/>
+              </a:rPr>
+              <a:t>speed</a:t>
+            </a:r>
+            <a:r>
+              <a:rPr lang="ms-MY" sz="1800" spc="-5" dirty="0">
+                <a:effectLst/>
+                <a:latin typeface="Times New Roman" panose="02020603050405020304" pitchFamily="18" charset="0"/>
+                <a:ea typeface="Times New Roman" panose="02020603050405020304" pitchFamily="18" charset="0"/>
+              </a:rPr>
+              <a:t> </a:t>
+            </a:r>
+            <a:r>
+              <a:rPr lang="ms-MY" sz="1800" dirty="0">
+                <a:effectLst/>
+                <a:latin typeface="Times New Roman" panose="02020603050405020304" pitchFamily="18" charset="0"/>
+                <a:ea typeface="Times New Roman" panose="02020603050405020304" pitchFamily="18" charset="0"/>
+              </a:rPr>
+              <a:t>of</a:t>
+            </a:r>
+            <a:r>
+              <a:rPr lang="ms-MY" sz="1800" spc="-10" dirty="0">
+                <a:effectLst/>
+                <a:latin typeface="Times New Roman" panose="02020603050405020304" pitchFamily="18" charset="0"/>
+                <a:ea typeface="Times New Roman" panose="02020603050405020304" pitchFamily="18" charset="0"/>
+              </a:rPr>
+              <a:t> </a:t>
+            </a:r>
+            <a:r>
+              <a:rPr lang="ms-MY" sz="1800" dirty="0">
+                <a:effectLst/>
+                <a:latin typeface="Times New Roman" panose="02020603050405020304" pitchFamily="18" charset="0"/>
+                <a:ea typeface="Times New Roman" panose="02020603050405020304" pitchFamily="18" charset="0"/>
+              </a:rPr>
+              <a:t>2300</a:t>
+            </a:r>
+            <a:r>
+              <a:rPr lang="ms-MY" sz="1800" spc="-20" dirty="0">
+                <a:effectLst/>
+                <a:latin typeface="Times New Roman" panose="02020603050405020304" pitchFamily="18" charset="0"/>
+                <a:ea typeface="Times New Roman" panose="02020603050405020304" pitchFamily="18" charset="0"/>
+              </a:rPr>
+              <a:t> </a:t>
+            </a:r>
+            <a:r>
+              <a:rPr lang="ms-MY" sz="1800" dirty="0">
+                <a:effectLst/>
+                <a:latin typeface="Times New Roman" panose="02020603050405020304" pitchFamily="18" charset="0"/>
+                <a:ea typeface="Times New Roman" panose="02020603050405020304" pitchFamily="18" charset="0"/>
+              </a:rPr>
+              <a:t>m</a:t>
+            </a:r>
+            <a:r>
+              <a:rPr lang="ms-MY" sz="1800" spc="5" dirty="0">
+                <a:effectLst/>
+                <a:latin typeface="Times New Roman" panose="02020603050405020304" pitchFamily="18" charset="0"/>
+                <a:ea typeface="Times New Roman" panose="02020603050405020304" pitchFamily="18" charset="0"/>
+              </a:rPr>
+              <a:t> </a:t>
+            </a:r>
+            <a:r>
+              <a:rPr lang="ms-MY" sz="1800" dirty="0">
+                <a:effectLst/>
+                <a:latin typeface="Times New Roman" panose="02020603050405020304" pitchFamily="18" charset="0"/>
+                <a:ea typeface="Times New Roman" panose="02020603050405020304" pitchFamily="18" charset="0"/>
+              </a:rPr>
+              <a:t>s</a:t>
+            </a:r>
+            <a:r>
+              <a:rPr lang="ms-MY" sz="1800" baseline="30000" dirty="0">
+                <a:effectLst/>
+                <a:latin typeface="Times New Roman" panose="02020603050405020304" pitchFamily="18" charset="0"/>
+                <a:ea typeface="Times New Roman" panose="02020603050405020304" pitchFamily="18" charset="0"/>
+              </a:rPr>
+              <a:t>-</a:t>
+            </a:r>
+            <a:r>
+              <a:rPr lang="ms-MY" sz="1800" spc="-25" baseline="30000" dirty="0">
+                <a:effectLst/>
+                <a:latin typeface="Times New Roman" panose="02020603050405020304" pitchFamily="18" charset="0"/>
+                <a:ea typeface="Times New Roman" panose="02020603050405020304" pitchFamily="18" charset="0"/>
+              </a:rPr>
+              <a:t>1</a:t>
+            </a:r>
+            <a:r>
+              <a:rPr lang="ms-MY" sz="1800" spc="-25" dirty="0">
+                <a:effectLst/>
+                <a:latin typeface="Times New Roman" panose="02020603050405020304" pitchFamily="18" charset="0"/>
+                <a:ea typeface="Times New Roman" panose="02020603050405020304" pitchFamily="18" charset="0"/>
+              </a:rPr>
+              <a:t>?									</a:t>
+            </a:r>
+            <a:r>
+              <a:rPr lang="ms-MY" sz="1800" dirty="0">
+                <a:effectLst/>
+                <a:latin typeface="Times New Roman" panose="02020603050405020304" pitchFamily="18" charset="0"/>
+                <a:ea typeface="Times New Roman" panose="02020603050405020304" pitchFamily="18" charset="0"/>
+              </a:rPr>
+              <a:t>[2 </a:t>
+            </a:r>
+            <a:r>
+              <a:rPr lang="ms-MY" sz="1800" i="1" spc="-10" dirty="0">
+                <a:effectLst/>
+                <a:latin typeface="Times New Roman" panose="02020603050405020304" pitchFamily="18" charset="0"/>
+                <a:ea typeface="Times New Roman" panose="02020603050405020304" pitchFamily="18" charset="0"/>
+              </a:rPr>
+              <a:t>marks</a:t>
+            </a:r>
+            <a:r>
+              <a:rPr lang="ms-MY" sz="1800" spc="-10" dirty="0">
+                <a:effectLst/>
+                <a:latin typeface="Times New Roman" panose="02020603050405020304" pitchFamily="18" charset="0"/>
+                <a:ea typeface="Times New Roman" panose="02020603050405020304" pitchFamily="18" charset="0"/>
+              </a:rPr>
+              <a:t>]</a:t>
+            </a:r>
+            <a:endParaRPr lang="en-MY" sz="1800" dirty="0">
+              <a:effectLst/>
+              <a:latin typeface="Times New Roman" panose="02020603050405020304" pitchFamily="18" charset="0"/>
+              <a:ea typeface="Times New Roman" panose="02020603050405020304" pitchFamily="18" charset="0"/>
+            </a:endParaRPr>
+          </a:p>
+          <a:p>
+            <a:br>
+              <a:rPr lang="ms-MY" sz="1800" dirty="0">
+                <a:effectLst/>
+                <a:latin typeface="Times New Roman" panose="02020603050405020304" pitchFamily="18" charset="0"/>
+                <a:ea typeface="Times New Roman" panose="02020603050405020304" pitchFamily="18" charset="0"/>
+              </a:rPr>
+            </a:br>
+            <a:r>
+              <a:rPr lang="ms-MY" sz="1800" dirty="0">
+                <a:effectLst/>
+                <a:latin typeface="Times New Roman" panose="02020603050405020304" pitchFamily="18" charset="0"/>
+                <a:ea typeface="Times New Roman" panose="02020603050405020304" pitchFamily="18" charset="0"/>
+              </a:rPr>
+              <a:t>(b)   The electron beam in an electron microscope is formed by a set up similar to the electron gun</a:t>
+            </a:r>
+            <a:r>
+              <a:rPr lang="ms-MY" sz="1800" spc="20" dirty="0">
+                <a:effectLst/>
+                <a:latin typeface="Times New Roman" panose="02020603050405020304" pitchFamily="18" charset="0"/>
+                <a:ea typeface="Times New Roman" panose="02020603050405020304" pitchFamily="18" charset="0"/>
+              </a:rPr>
+              <a:t> </a:t>
+            </a:r>
+            <a:r>
+              <a:rPr lang="ms-MY" sz="1800" dirty="0">
+                <a:effectLst/>
+                <a:latin typeface="Times New Roman" panose="02020603050405020304" pitchFamily="18" charset="0"/>
+                <a:ea typeface="Times New Roman" panose="02020603050405020304" pitchFamily="18" charset="0"/>
+              </a:rPr>
+              <a:t>used</a:t>
+            </a:r>
+            <a:r>
+              <a:rPr lang="ms-MY" sz="1800" spc="10" dirty="0">
+                <a:effectLst/>
+                <a:latin typeface="Times New Roman" panose="02020603050405020304" pitchFamily="18" charset="0"/>
+                <a:ea typeface="Times New Roman" panose="02020603050405020304" pitchFamily="18" charset="0"/>
+              </a:rPr>
+              <a:t> </a:t>
+            </a:r>
+            <a:r>
+              <a:rPr lang="ms-MY" sz="1800" dirty="0">
+                <a:effectLst/>
+                <a:latin typeface="Times New Roman" panose="02020603050405020304" pitchFamily="18" charset="0"/>
+                <a:ea typeface="Times New Roman" panose="02020603050405020304" pitchFamily="18" charset="0"/>
+              </a:rPr>
+              <a:t>in</a:t>
+            </a:r>
+            <a:r>
+              <a:rPr lang="ms-MY" sz="1800" spc="5" dirty="0">
+                <a:effectLst/>
+                <a:latin typeface="Times New Roman" panose="02020603050405020304" pitchFamily="18" charset="0"/>
+                <a:ea typeface="Times New Roman" panose="02020603050405020304" pitchFamily="18" charset="0"/>
+              </a:rPr>
+              <a:t> </a:t>
+            </a:r>
+            <a:r>
+              <a:rPr lang="ms-MY" sz="1800" dirty="0">
+                <a:effectLst/>
+                <a:latin typeface="Times New Roman" panose="02020603050405020304" pitchFamily="18" charset="0"/>
+                <a:ea typeface="Times New Roman" panose="02020603050405020304" pitchFamily="18" charset="0"/>
+              </a:rPr>
+              <a:t>the</a:t>
+            </a:r>
+            <a:r>
+              <a:rPr lang="ms-MY" sz="1800" spc="10" dirty="0">
+                <a:effectLst/>
+                <a:latin typeface="Times New Roman" panose="02020603050405020304" pitchFamily="18" charset="0"/>
+                <a:ea typeface="Times New Roman" panose="02020603050405020304" pitchFamily="18" charset="0"/>
+              </a:rPr>
+              <a:t> </a:t>
+            </a:r>
+            <a:r>
+              <a:rPr lang="ms-MY" sz="1800" dirty="0">
+                <a:effectLst/>
+                <a:latin typeface="Times New Roman" panose="02020603050405020304" pitchFamily="18" charset="0"/>
+                <a:ea typeface="Times New Roman" panose="02020603050405020304" pitchFamily="18" charset="0"/>
+              </a:rPr>
+              <a:t>Davisson-Germer</a:t>
+            </a:r>
+            <a:r>
+              <a:rPr lang="ms-MY" sz="1800" spc="15" dirty="0">
+                <a:effectLst/>
+                <a:latin typeface="Times New Roman" panose="02020603050405020304" pitchFamily="18" charset="0"/>
+                <a:ea typeface="Times New Roman" panose="02020603050405020304" pitchFamily="18" charset="0"/>
+              </a:rPr>
+              <a:t> </a:t>
+            </a:r>
+            <a:r>
+              <a:rPr lang="ms-MY" sz="1800" dirty="0">
+                <a:effectLst/>
+                <a:latin typeface="Times New Roman" panose="02020603050405020304" pitchFamily="18" charset="0"/>
+                <a:ea typeface="Times New Roman" panose="02020603050405020304" pitchFamily="18" charset="0"/>
+              </a:rPr>
+              <a:t>experiment.</a:t>
+            </a:r>
+            <a:r>
+              <a:rPr lang="ms-MY" sz="1800" spc="5" dirty="0">
+                <a:effectLst/>
+                <a:latin typeface="Times New Roman" panose="02020603050405020304" pitchFamily="18" charset="0"/>
+                <a:ea typeface="Times New Roman" panose="02020603050405020304" pitchFamily="18" charset="0"/>
+              </a:rPr>
+              <a:t> </a:t>
+            </a:r>
+            <a:r>
+              <a:rPr lang="ms-MY" sz="1800" dirty="0">
+                <a:effectLst/>
+                <a:latin typeface="Times New Roman" panose="02020603050405020304" pitchFamily="18" charset="0"/>
+                <a:ea typeface="Times New Roman" panose="02020603050405020304" pitchFamily="18" charset="0"/>
+              </a:rPr>
+              <a:t>What</a:t>
+            </a:r>
+            <a:r>
+              <a:rPr lang="ms-MY" sz="1800" spc="10" dirty="0">
+                <a:effectLst/>
+                <a:latin typeface="Times New Roman" panose="02020603050405020304" pitchFamily="18" charset="0"/>
+                <a:ea typeface="Times New Roman" panose="02020603050405020304" pitchFamily="18" charset="0"/>
+              </a:rPr>
+              <a:t> </a:t>
+            </a:r>
+            <a:r>
+              <a:rPr lang="ms-MY" sz="1800" dirty="0">
+                <a:effectLst/>
+                <a:latin typeface="Times New Roman" panose="02020603050405020304" pitchFamily="18" charset="0"/>
+                <a:ea typeface="Times New Roman" panose="02020603050405020304" pitchFamily="18" charset="0"/>
+              </a:rPr>
+              <a:t>is</a:t>
+            </a:r>
+            <a:r>
+              <a:rPr lang="ms-MY" sz="1800" spc="20" dirty="0">
+                <a:effectLst/>
+                <a:latin typeface="Times New Roman" panose="02020603050405020304" pitchFamily="18" charset="0"/>
+                <a:ea typeface="Times New Roman" panose="02020603050405020304" pitchFamily="18" charset="0"/>
+              </a:rPr>
+              <a:t> </a:t>
+            </a:r>
+            <a:r>
+              <a:rPr lang="ms-MY" sz="1800" dirty="0">
+                <a:effectLst/>
+                <a:latin typeface="Times New Roman" panose="02020603050405020304" pitchFamily="18" charset="0"/>
+                <a:ea typeface="Times New Roman" panose="02020603050405020304" pitchFamily="18" charset="0"/>
+              </a:rPr>
+              <a:t>the</a:t>
+            </a:r>
+            <a:r>
+              <a:rPr lang="ms-MY" sz="1800" spc="25" dirty="0">
+                <a:effectLst/>
+                <a:latin typeface="Times New Roman" panose="02020603050405020304" pitchFamily="18" charset="0"/>
+                <a:ea typeface="Times New Roman" panose="02020603050405020304" pitchFamily="18" charset="0"/>
+              </a:rPr>
+              <a:t> </a:t>
+            </a:r>
+            <a:r>
+              <a:rPr lang="ms-MY" sz="1800" dirty="0">
+                <a:effectLst/>
+                <a:latin typeface="Times New Roman" panose="02020603050405020304" pitchFamily="18" charset="0"/>
+                <a:ea typeface="Times New Roman" panose="02020603050405020304" pitchFamily="18" charset="0"/>
+              </a:rPr>
+              <a:t>voltage</a:t>
+            </a:r>
+            <a:r>
+              <a:rPr lang="ms-MY" sz="1800" spc="10" dirty="0">
+                <a:effectLst/>
+                <a:latin typeface="Times New Roman" panose="02020603050405020304" pitchFamily="18" charset="0"/>
+                <a:ea typeface="Times New Roman" panose="02020603050405020304" pitchFamily="18" charset="0"/>
+              </a:rPr>
+              <a:t> </a:t>
+            </a:r>
+            <a:r>
+              <a:rPr lang="ms-MY" sz="1800" dirty="0">
+                <a:effectLst/>
+                <a:latin typeface="Times New Roman" panose="02020603050405020304" pitchFamily="18" charset="0"/>
+                <a:ea typeface="Times New Roman" panose="02020603050405020304" pitchFamily="18" charset="0"/>
+              </a:rPr>
+              <a:t>needed</a:t>
+            </a:r>
+            <a:r>
+              <a:rPr lang="ms-MY" sz="1800" spc="10" dirty="0">
+                <a:effectLst/>
+                <a:latin typeface="Times New Roman" panose="02020603050405020304" pitchFamily="18" charset="0"/>
+                <a:ea typeface="Times New Roman" panose="02020603050405020304" pitchFamily="18" charset="0"/>
+              </a:rPr>
+              <a:t> </a:t>
+            </a:r>
+            <a:r>
+              <a:rPr lang="ms-MY" sz="1800" dirty="0">
+                <a:effectLst/>
+                <a:latin typeface="Times New Roman" panose="02020603050405020304" pitchFamily="18" charset="0"/>
+                <a:ea typeface="Times New Roman" panose="02020603050405020304" pitchFamily="18" charset="0"/>
+              </a:rPr>
+              <a:t>to</a:t>
+            </a:r>
+            <a:r>
+              <a:rPr lang="ms-MY" sz="1800" spc="5" dirty="0">
+                <a:effectLst/>
+                <a:latin typeface="Times New Roman" panose="02020603050405020304" pitchFamily="18" charset="0"/>
+                <a:ea typeface="Times New Roman" panose="02020603050405020304" pitchFamily="18" charset="0"/>
+              </a:rPr>
+              <a:t> </a:t>
+            </a:r>
+            <a:r>
+              <a:rPr lang="ms-MY" sz="1800" dirty="0">
+                <a:effectLst/>
+                <a:latin typeface="Times New Roman" panose="02020603050405020304" pitchFamily="18" charset="0"/>
+                <a:ea typeface="Times New Roman" panose="02020603050405020304" pitchFamily="18" charset="0"/>
+              </a:rPr>
+              <a:t>accelerate</a:t>
+            </a:r>
+            <a:r>
+              <a:rPr lang="ms-MY" sz="1800" spc="25" dirty="0">
+                <a:effectLst/>
+                <a:latin typeface="Times New Roman" panose="02020603050405020304" pitchFamily="18" charset="0"/>
+                <a:ea typeface="Times New Roman" panose="02020603050405020304" pitchFamily="18" charset="0"/>
+              </a:rPr>
+              <a:t> </a:t>
+            </a:r>
+            <a:r>
+              <a:rPr lang="ms-MY" sz="1800" spc="-25" dirty="0">
+                <a:effectLst/>
+                <a:latin typeface="Times New Roman" panose="02020603050405020304" pitchFamily="18" charset="0"/>
+                <a:ea typeface="Times New Roman" panose="02020603050405020304" pitchFamily="18" charset="0"/>
+              </a:rPr>
+              <a:t>an </a:t>
+            </a:r>
+            <a:r>
+              <a:rPr lang="ms-MY" sz="1800" dirty="0">
+                <a:effectLst/>
+                <a:latin typeface="Times New Roman" panose="02020603050405020304" pitchFamily="18" charset="0"/>
+                <a:ea typeface="Times New Roman" panose="02020603050405020304" pitchFamily="18" charset="0"/>
+              </a:rPr>
+              <a:t>electron</a:t>
+            </a:r>
+            <a:r>
+              <a:rPr lang="ms-MY" sz="1800" spc="-20" dirty="0">
+                <a:effectLst/>
+                <a:latin typeface="Times New Roman" panose="02020603050405020304" pitchFamily="18" charset="0"/>
+                <a:ea typeface="Times New Roman" panose="02020603050405020304" pitchFamily="18" charset="0"/>
+              </a:rPr>
+              <a:t> </a:t>
+            </a:r>
+            <a:r>
+              <a:rPr lang="ms-MY" sz="1800" dirty="0">
+                <a:effectLst/>
+                <a:latin typeface="Times New Roman" panose="02020603050405020304" pitchFamily="18" charset="0"/>
+                <a:ea typeface="Times New Roman" panose="02020603050405020304" pitchFamily="18" charset="0"/>
+              </a:rPr>
+              <a:t>which</a:t>
+            </a:r>
+            <a:r>
+              <a:rPr lang="ms-MY" sz="1800" spc="-15" dirty="0">
+                <a:effectLst/>
+                <a:latin typeface="Times New Roman" panose="02020603050405020304" pitchFamily="18" charset="0"/>
+                <a:ea typeface="Times New Roman" panose="02020603050405020304" pitchFamily="18" charset="0"/>
+              </a:rPr>
+              <a:t> </a:t>
+            </a:r>
+            <a:r>
+              <a:rPr lang="ms-MY" sz="1800" dirty="0">
+                <a:effectLst/>
+                <a:latin typeface="Times New Roman" panose="02020603050405020304" pitchFamily="18" charset="0"/>
+                <a:ea typeface="Times New Roman" panose="02020603050405020304" pitchFamily="18" charset="0"/>
+              </a:rPr>
+              <a:t>has</a:t>
+            </a:r>
+            <a:r>
+              <a:rPr lang="ms-MY" sz="1800" spc="-20" dirty="0">
+                <a:effectLst/>
+                <a:latin typeface="Times New Roman" panose="02020603050405020304" pitchFamily="18" charset="0"/>
+                <a:ea typeface="Times New Roman" panose="02020603050405020304" pitchFamily="18" charset="0"/>
+              </a:rPr>
+              <a:t> </a:t>
+            </a:r>
+            <a:r>
+              <a:rPr lang="ms-MY" sz="1800" dirty="0">
+                <a:effectLst/>
+                <a:latin typeface="Times New Roman" panose="02020603050405020304" pitchFamily="18" charset="0"/>
+                <a:ea typeface="Times New Roman" panose="02020603050405020304" pitchFamily="18" charset="0"/>
+              </a:rPr>
+              <a:t>de</a:t>
+            </a:r>
+            <a:r>
+              <a:rPr lang="ms-MY" sz="1800" spc="-15" dirty="0">
+                <a:effectLst/>
+                <a:latin typeface="Times New Roman" panose="02020603050405020304" pitchFamily="18" charset="0"/>
+                <a:ea typeface="Times New Roman" panose="02020603050405020304" pitchFamily="18" charset="0"/>
+              </a:rPr>
+              <a:t> </a:t>
+            </a:r>
+            <a:r>
+              <a:rPr lang="ms-MY" sz="1800" dirty="0">
+                <a:effectLst/>
+                <a:latin typeface="Times New Roman" panose="02020603050405020304" pitchFamily="18" charset="0"/>
+                <a:ea typeface="Times New Roman" panose="02020603050405020304" pitchFamily="18" charset="0"/>
+              </a:rPr>
+              <a:t>Broglie</a:t>
+            </a:r>
+            <a:r>
+              <a:rPr lang="ms-MY" sz="1800" spc="-15" dirty="0">
+                <a:effectLst/>
+                <a:latin typeface="Times New Roman" panose="02020603050405020304" pitchFamily="18" charset="0"/>
+                <a:ea typeface="Times New Roman" panose="02020603050405020304" pitchFamily="18" charset="0"/>
+              </a:rPr>
+              <a:t> </a:t>
+            </a:r>
+            <a:r>
+              <a:rPr lang="ms-MY" sz="1800" dirty="0">
+                <a:effectLst/>
+                <a:latin typeface="Times New Roman" panose="02020603050405020304" pitchFamily="18" charset="0"/>
+                <a:ea typeface="Times New Roman" panose="02020603050405020304" pitchFamily="18" charset="0"/>
+              </a:rPr>
+              <a:t>wavelength</a:t>
+            </a:r>
+            <a:r>
+              <a:rPr lang="ms-MY" sz="1800" spc="-20" dirty="0">
+                <a:effectLst/>
+                <a:latin typeface="Times New Roman" panose="02020603050405020304" pitchFamily="18" charset="0"/>
+                <a:ea typeface="Times New Roman" panose="02020603050405020304" pitchFamily="18" charset="0"/>
+              </a:rPr>
+              <a:t> </a:t>
+            </a:r>
+            <a:r>
+              <a:rPr lang="ms-MY" sz="1800" dirty="0">
+                <a:effectLst/>
+                <a:latin typeface="Times New Roman" panose="02020603050405020304" pitchFamily="18" charset="0"/>
+                <a:ea typeface="Times New Roman" panose="02020603050405020304" pitchFamily="18" charset="0"/>
+              </a:rPr>
+              <a:t>of</a:t>
+            </a:r>
+            <a:r>
+              <a:rPr lang="ms-MY" sz="1800" spc="-15" dirty="0">
+                <a:effectLst/>
+                <a:latin typeface="Times New Roman" panose="02020603050405020304" pitchFamily="18" charset="0"/>
+                <a:ea typeface="Times New Roman" panose="02020603050405020304" pitchFamily="18" charset="0"/>
+              </a:rPr>
+              <a:t> </a:t>
+            </a:r>
+            <a:r>
+              <a:rPr lang="ms-MY" sz="1800" dirty="0">
+                <a:effectLst/>
+                <a:latin typeface="Times New Roman" panose="02020603050405020304" pitchFamily="18" charset="0"/>
+                <a:ea typeface="Times New Roman" panose="02020603050405020304" pitchFamily="18" charset="0"/>
+              </a:rPr>
+              <a:t>0.50</a:t>
+            </a:r>
+            <a:r>
+              <a:rPr lang="ms-MY" sz="1800" spc="-30" dirty="0">
+                <a:effectLst/>
+                <a:latin typeface="Times New Roman" panose="02020603050405020304" pitchFamily="18" charset="0"/>
+                <a:ea typeface="Times New Roman" panose="02020603050405020304" pitchFamily="18" charset="0"/>
+              </a:rPr>
+              <a:t> </a:t>
+            </a:r>
+            <a:r>
+              <a:rPr lang="ms-MY" sz="1800" spc="-25" dirty="0">
+                <a:effectLst/>
+                <a:latin typeface="Times New Roman" panose="02020603050405020304" pitchFamily="18" charset="0"/>
+                <a:ea typeface="Times New Roman" panose="02020603050405020304" pitchFamily="18" charset="0"/>
+              </a:rPr>
+              <a:t>nm? 								</a:t>
+            </a:r>
+            <a:r>
+              <a:rPr lang="ms-MY" dirty="0">
+                <a:latin typeface="Times New Roman" panose="02020603050405020304" pitchFamily="18" charset="0"/>
+                <a:ea typeface="Times New Roman" panose="02020603050405020304" pitchFamily="18" charset="0"/>
+              </a:rPr>
+              <a:t>[1 </a:t>
+            </a:r>
+            <a:r>
+              <a:rPr lang="ms-MY" i="1" spc="-10" dirty="0">
+                <a:latin typeface="Times New Roman" panose="02020603050405020304" pitchFamily="18" charset="0"/>
+                <a:ea typeface="Times New Roman" panose="02020603050405020304" pitchFamily="18" charset="0"/>
+              </a:rPr>
+              <a:t>marks</a:t>
+            </a:r>
+            <a:r>
+              <a:rPr lang="ms-MY" spc="-10" dirty="0">
+                <a:latin typeface="Times New Roman" panose="02020603050405020304" pitchFamily="18" charset="0"/>
+                <a:ea typeface="Times New Roman" panose="02020603050405020304" pitchFamily="18" charset="0"/>
+              </a:rPr>
+              <a:t>]</a:t>
+            </a:r>
+            <a:endParaRPr lang="en-MY" dirty="0">
+              <a:latin typeface="Times New Roman" panose="02020603050405020304" pitchFamily="18" charset="0"/>
+              <a:ea typeface="Times New Roman" panose="02020603050405020304" pitchFamily="18" charset="0"/>
+            </a:endParaRPr>
+          </a:p>
+        </p:txBody>
+      </p:sp>
+      <p:pic>
+        <p:nvPicPr>
+          <p:cNvPr id="5" name="Picture 4">
+            <a:extLst>
+              <a:ext uri="{FF2B5EF4-FFF2-40B4-BE49-F238E27FC236}">
+                <a16:creationId xmlns:a16="http://schemas.microsoft.com/office/drawing/2014/main" id="{966481BB-7D42-CEC6-8935-5FB8F547B98A}"/>
+              </a:ext>
+            </a:extLst>
+          </p:cNvPr>
+          <p:cNvPicPr>
+            <a:picLocks noChangeAspect="1"/>
+          </p:cNvPicPr>
+          <p:nvPr/>
+        </p:nvPicPr>
+        <p:blipFill>
+          <a:blip r:embed="rId2"/>
+          <a:stretch>
+            <a:fillRect/>
+          </a:stretch>
+        </p:blipFill>
+        <p:spPr>
+          <a:xfrm>
+            <a:off x="9153101" y="5632829"/>
+            <a:ext cx="3038899" cy="590632"/>
+          </a:xfrm>
+          <a:prstGeom prst="rect">
+            <a:avLst/>
+          </a:prstGeom>
+        </p:spPr>
+      </p:pic>
+    </p:spTree>
+    <p:extLst>
+      <p:ext uri="{BB962C8B-B14F-4D97-AF65-F5344CB8AC3E}">
+        <p14:creationId xmlns:p14="http://schemas.microsoft.com/office/powerpoint/2010/main" val="3159316212"/>
+      </p:ext>
+    </p:extLst>
+  </p:cSld>
+  <p:clrMapOvr>
+    <a:masterClrMapping/>
+  </p:clrMapOvr>
+</p:sld>
+</file>
+
+<file path=ppt/slides/slide8.xml><?xml version="1.0" encoding="utf-8"?>
+<p:sld xmlns:a="http://schemas.openxmlformats.org/drawingml/2006/main" xmlns:r="http://schemas.openxmlformats.org/officeDocument/2006/relationships" xmlns:p="http://schemas.openxmlformats.org/presentationml/2006/main">
+  <p:cSld>
+    <p:spTree>
+      <p:nvGrpSpPr>
+        <p:cNvPr id="1" name="">
+          <a:extLst>
+            <a:ext uri="{FF2B5EF4-FFF2-40B4-BE49-F238E27FC236}">
               <a16:creationId xmlns:a16="http://schemas.microsoft.com/office/drawing/2014/main" id="{336F3604-BE57-F536-D9AB-F9C47FE87E22}"/>
             </a:ext>
           </a:extLst>
@@ -4260,8 +6075,8 @@
           <a:chExt cx="0" cy="0"/>
         </a:xfrm>
       </p:grpSpPr>
-      <mc:AlternateContent xmlns:mc="http://schemas.openxmlformats.org/markup-compatibility/2006">
-        <mc:Choice xmlns:a14="http://schemas.microsoft.com/office/drawing/2010/main" Requires="a14">
+      <mc:AlternateContent xmlns:mc="http://schemas.openxmlformats.org/markup-compatibility/2006" xmlns:a14="http://schemas.microsoft.com/office/drawing/2010/main">
+        <mc:Choice Requires="a14">
           <p:sp>
             <p:nvSpPr>
               <p:cNvPr id="7" name="TextBox 6">
@@ -4364,7 +6179,7 @@
             </p:txBody>
           </p:sp>
         </mc:Choice>
-        <mc:Fallback>
+        <mc:Fallback xmlns="">
           <p:sp>
             <p:nvSpPr>
               <p:cNvPr id="7" name="TextBox 6">
@@ -4457,7 +6272,7 @@
 </p:sld>
 </file>
 
-<file path=ppt/slides/slide3.xml><?xml version="1.0" encoding="utf-8"?>
+<file path=ppt/slides/slide9.xml><?xml version="1.0" encoding="utf-8"?>
 <p:sld xmlns:a="http://schemas.openxmlformats.org/drawingml/2006/main" xmlns:r="http://schemas.openxmlformats.org/officeDocument/2006/relationships" xmlns:p="http://schemas.openxmlformats.org/presentationml/2006/main">
   <p:cSld>
     <p:spTree>
